--- a/public/fun/pack/pptx/familypro/가족소개프리미엄_01_우리부부_아이보리로즈골드.pptx
+++ b/public/fun/pack/pptx/familypro/가족소개프리미엄_01_우리부부_아이보리로즈골드.pptx
@@ -113,12 +113,12 @@
   <p:extLst>
     <p:ext uri="{521415D9-36F7-43E2-AB2F-B90AF26B5E84}">
       <p14:sectionLst xmlns:p14="http://schemas.microsoft.com/office/powerpoint/2010/main">
-        <p14:section name="시작" id="{1230EB90-EB9D-4129-A9BA-9D93DF52281C}">
+        <p14:section name="시작" id="{DEA5CEAE-B278-4542-B6D5-FC514B8F5626}">
           <p14:sldIdLst>
             <p14:sldId id="256"/>
           </p14:sldIdLst>
         </p14:section>
-        <p14:section name="본문" id="{9EC96596-5982-4AA1-A7C9-A2665D3AC35F}">
+        <p14:section name="본문" id="{B76A873F-03D2-458A-8D57-2FCA9BD9AC69}">
           <p14:sldIdLst>
             <p14:sldId id="257"/>
             <p14:sldId id="258"/>
@@ -127,7 +127,7 @@
             <p14:sldId id="261"/>
           </p14:sldIdLst>
         </p14:section>
-        <p14:section name="마무리" id="{8B631AC2-9171-4C39-B4C0-9ABB253BAC70}">
+        <p14:section name="마무리" id="{828DF3EA-FAE5-46A4-A64E-DECD90F8CEBD}">
           <p14:sldIdLst>
             <p14:sldId id="262"/>
           </p14:sldIdLst>
@@ -1962,7 +1962,7 @@
             </a:lvl1pPr>
           </a:lstStyle>
           <a:p>
-            <a:fld id="{6F22E8F1-02BF-4456-938D-3A30ADB1473C}" type="slidenum">
+            <a:fld id="{B018FA55-A2AC-444A-A1D9-460DCCFCA656}" type="slidenum">
               <a:rPr lang="en-US"/>
               <a:t>‹#›</a:t>
             </a:fld>
@@ -3395,7 +3395,7 @@
             </a:lvl1pPr>
           </a:lstStyle>
           <a:p>
-            <a:fld id="{0BE79E98-4238-4774-AE27-C4677D4A2595}" type="slidenum">
+            <a:fld id="{126F90A9-7B2D-4DFB-87BE-05A137515059}" type="slidenum">
               <a:rPr lang="en-US"/>
               <a:t>‹#›</a:t>
             </a:fld>
@@ -4405,7 +4405,7 @@
             </a:lvl1pPr>
           </a:lstStyle>
           <a:p>
-            <a:fld id="{0428056D-7267-4AD8-A916-B08594FC99B5}" type="slidenum">
+            <a:fld id="{2F05397C-830E-4F04-8022-053226A084C3}" type="slidenum">
               <a:rPr lang="en-US"/>
               <a:t>‹#›</a:t>
             </a:fld>
@@ -5568,7 +5568,7 @@
           <a:p>
             <a:r>
               <a:rPr lang="ko-KR"/>
-              <a:t>우리 부부 · 0000. 00. 00</a:t>
+              <a:t>우리 부부 · 날짜 입력</a:t>
             </a:r>
           </a:p>
         </p:txBody>
@@ -5791,7 +5791,7 @@
           <a:bodyPr/>
           <a:lstStyle/>
           <a:p>
-            <a:fld id="{BAECE4E4-3220-4ED6-9378-86C45A830F9A}" type="slidenum">
+            <a:fld id="{007BDE11-26B7-4F7F-8C3E-FD4837A78870}" type="slidenum">
               <a:rPr lang="en-US"/>
               <a:t>‹#›</a:t>
             </a:fld>
@@ -6193,7 +6193,7 @@
           <a:bodyPr/>
           <a:lstStyle/>
           <a:p>
-            <a:fld id="{70C7ED7D-D9B4-4CCE-9074-109C6437A049}" type="slidenum">
+            <a:fld id="{C922194A-BDBC-4BDB-A320-1440E88F8C65}" type="slidenum">
               <a:rPr lang="en-US"/>
               <a:t>‹#›</a:t>
             </a:fld>
@@ -7035,7 +7035,7 @@
           <a:bodyPr/>
           <a:lstStyle/>
           <a:p>
-            <a:fld id="{517BE479-47C3-4CF0-A76F-6D83ED892C68}" type="slidenum">
+            <a:fld id="{26D21080-4A68-4DA5-B776-706C3B7E0730}" type="slidenum">
               <a:rPr lang="en-US"/>
               <a:t>‹#›</a:t>
             </a:fld>
@@ -8308,7 +8308,7 @@
           <a:bodyPr/>
           <a:lstStyle/>
           <a:p>
-            <a:fld id="{1810A92F-E918-4FAE-A6FE-C1559131AD95}" type="slidenum">
+            <a:fld id="{3CF944A6-2920-4371-83D5-0B3AC62808DF}" type="slidenum">
               <a:rPr lang="en-US"/>
               <a:t>‹#›</a:t>
             </a:fld>
@@ -8396,7 +8396,7 @@
           <a:bodyPr/>
           <a:lstStyle/>
           <a:p>
-            <a:fld id="{3CE629F6-A30E-44A2-A5A9-11E945C641E0}" type="slidenum">
+            <a:fld id="{6DDD83FC-E09A-465F-BD45-3C4E3A101006}" type="slidenum">
               <a:rPr lang="en-US"/>
               <a:t>‹#›</a:t>
             </a:fld>
